--- a/reference/governance/sdlc/assets/ums-evolith-reference-executive-deck.pptx
+++ b/reference/governance/sdlc/assets/ums-evolith-reference-executive-deck.pptx
@@ -3215,7 +3215,11 @@
             <p:ph idx="1"/>
           </p:nvPr>
         </p:nvSpPr>
-        <p:spPr/>
+        <p:spPr>
+          <a:xfrm>
+            <a:ext cx="4114800" cy="0"/>
+          </a:xfrm>
+        </p:spPr>
         <p:txBody>
           <a:bodyPr/>
           <a:lstStyle/>
@@ -3262,6 +3266,30 @@
           </a:p>
         </p:txBody>
       </p:sp>
+      <p:pic>
+        <p:nvPicPr>
+          <p:cNvPr id="4" name="Picture 3" descr="visual_1_A.png"/>
+          <p:cNvPicPr>
+            <a:picLocks noChangeAspect="1"/>
+          </p:cNvPicPr>
+          <p:nvPr/>
+        </p:nvPicPr>
+        <p:blipFill>
+          <a:blip r:embed="rId2"/>
+          <a:stretch>
+            <a:fillRect/>
+          </a:stretch>
+        </p:blipFill>
+        <p:spPr>
+          <a:xfrm>
+            <a:off x="4572000" y="-695946"/>
+            <a:ext cx="4114800" cy="9164293"/>
+          </a:xfrm>
+          <a:prstGeom prst="rect">
+            <a:avLst/>
+          </a:prstGeom>
+        </p:spPr>
+      </p:pic>
     </p:spTree>
   </p:cSld>
   <p:clrMapOvr>
@@ -3318,7 +3346,11 @@
             <p:ph idx="1"/>
           </p:nvPr>
         </p:nvSpPr>
-        <p:spPr/>
+        <p:spPr>
+          <a:xfrm>
+            <a:ext cx="4114800" cy="0"/>
+          </a:xfrm>
+        </p:spPr>
         <p:txBody>
           <a:bodyPr/>
           <a:lstStyle/>
@@ -3365,6 +3397,30 @@
           </a:p>
         </p:txBody>
       </p:sp>
+      <p:pic>
+        <p:nvPicPr>
+          <p:cNvPr id="4" name="Picture 3" descr="visual_1_B.png"/>
+          <p:cNvPicPr>
+            <a:picLocks noChangeAspect="1"/>
+          </p:cNvPicPr>
+          <p:nvPr/>
+        </p:nvPicPr>
+        <p:blipFill>
+          <a:blip r:embed="rId2"/>
+          <a:stretch>
+            <a:fillRect/>
+          </a:stretch>
+        </p:blipFill>
+        <p:spPr>
+          <a:xfrm>
+            <a:off x="4572000" y="3098929"/>
+            <a:ext cx="4114800" cy="1574541"/>
+          </a:xfrm>
+          <a:prstGeom prst="rect">
+            <a:avLst/>
+          </a:prstGeom>
+        </p:spPr>
+      </p:pic>
     </p:spTree>
   </p:cSld>
   <p:clrMapOvr>

--- a/reference/governance/sdlc/assets/ums-evolith-reference-executive-deck.pptx
+++ b/reference/governance/sdlc/assets/ums-evolith-reference-executive-deck.pptx
@@ -3119,14 +3119,14 @@
           <a:lstStyle/>
           <a:p>
             <a:pPr>
-              <a:defRPr b="1" sz="4400">
+              <a:defRPr b="1">
                 <a:solidFill>
                   <a:srgbClr val="FFFFFF"/>
                 </a:solidFill>
               </a:defRPr>
             </a:pPr>
             <a:r>
-              <a:t>Caso UMS</a:t>
+              <a:t>Caso UMS sobre Evolith</a:t>
             </a:r>
           </a:p>
         </p:txBody>
@@ -3147,14 +3147,14 @@
           <a:lstStyle/>
           <a:p>
             <a:pPr>
-              <a:defRPr sz="2400">
+              <a:defRPr>
                 <a:solidFill>
                   <a:srgbClr val="3B82F6"/>
                 </a:solidFill>
               </a:defRPr>
             </a:pPr>
             <a:r>
-              <a:t>Aplicación de Referencia sobre Evolith</a:t>
+              <a:t>Aplicación Empresarial de Referencia</a:t>
             </a:r>
           </a:p>
         </p:txBody>
@@ -3193,7 +3193,7 @@
           <a:lstStyle/>
           <a:p>
             <a:pPr>
-              <a:defRPr b="1" sz="3600">
+              <a:defRPr>
                 <a:solidFill>
                   <a:srgbClr val="1E3A5F"/>
                 </a:solidFill>
@@ -3217,7 +3217,7 @@
         </p:nvSpPr>
         <p:spPr>
           <a:xfrm>
-            <a:ext cx="4114800" cy="0"/>
+            <a:ext cx="3840480" cy="0"/>
           </a:xfrm>
         </p:spPr>
         <p:txBody>
@@ -3225,50 +3225,39 @@
           <a:lstStyle/>
           <a:p>
             <a:pPr>
-              <a:defRPr sz="2000"/>
+              <a:defRPr sz="1800"/>
             </a:pPr>
             <a:r>
-              <a:t>User Management System: Una aplicación real corporativa.</a:t>
+              <a:t>User Management System corporativo.</a:t>
             </a:r>
           </a:p>
           <a:p>
             <a:pPr>
               <a:spcBef>
-                <a:spcPts val="1000"/>
+                <a:spcPts val="800"/>
               </a:spcBef>
-              <a:defRPr sz="2000"/>
+              <a:defRPr sz="1800"/>
             </a:pPr>
             <a:r>
-              <a:t>No es la totalidad de Evolith, es un ejemplo de implementación.</a:t>
+              <a:t>Instanciación real de las reglas de Evolith.</a:t>
             </a:r>
           </a:p>
           <a:p>
             <a:pPr>
               <a:spcBef>
-                <a:spcPts val="1000"/>
+                <a:spcPts val="800"/>
               </a:spcBef>
-              <a:defRPr sz="2000"/>
+              <a:defRPr sz="1800"/>
             </a:pPr>
             <a:r>
-              <a:t>Demuestra cómo aplicar Evolith en un sistema empresarial real.</a:t>
-            </a:r>
-          </a:p>
-          <a:p>
-            <a:pPr>
-              <a:spcBef>
-                <a:spcPts val="1000"/>
-              </a:spcBef>
-              <a:defRPr sz="2000"/>
-            </a:pPr>
-            <a:r>
-              <a:t>Sirve como modelo a seguir para futuros sistemas satélite.</a:t>
+              <a:t>Demuestra viabilidad técnica.</a:t>
             </a:r>
           </a:p>
         </p:txBody>
       </p:sp>
       <p:pic>
         <p:nvPicPr>
-          <p:cNvPr id="4" name="Picture 3" descr="visual_1_A.png"/>
+          <p:cNvPr id="4" name="Picture 3" descr="ppt2_slide1.png"/>
           <p:cNvPicPr>
             <a:picLocks noChangeAspect="1"/>
           </p:cNvPicPr>
@@ -3282,8 +3271,8 @@
         </p:blipFill>
         <p:spPr>
           <a:xfrm>
-            <a:off x="4572000" y="-695946"/>
-            <a:ext cx="4114800" cy="9164293"/>
+            <a:off x="4114800" y="3046444"/>
+            <a:ext cx="4572000" cy="1679510"/>
           </a:xfrm>
           <a:prstGeom prst="rect">
             <a:avLst/>
@@ -3324,14 +3313,14 @@
           <a:lstStyle/>
           <a:p>
             <a:pPr>
-              <a:defRPr b="1" sz="3600">
+              <a:defRPr>
                 <a:solidFill>
                   <a:srgbClr val="1E3A5F"/>
                 </a:solidFill>
               </a:defRPr>
             </a:pPr>
             <a:r>
-              <a:t>2. ¿Por qué usar UMS como referencia?</a:t>
+              <a:t>2. Propósito como Referencia</a:t>
             </a:r>
           </a:p>
         </p:txBody>
@@ -3348,7 +3337,7 @@
         </p:nvSpPr>
         <p:spPr>
           <a:xfrm>
-            <a:ext cx="4114800" cy="0"/>
+            <a:ext cx="3840480" cy="0"/>
           </a:xfrm>
         </p:spPr>
         <p:txBody>
@@ -3356,50 +3345,39 @@
           <a:lstStyle/>
           <a:p>
             <a:pPr>
-              <a:defRPr sz="2000"/>
+              <a:defRPr sz="1800"/>
             </a:pPr>
             <a:r>
-              <a:t>Tangibiliza los conceptos abstractos de Evolith.</a:t>
+              <a:t>Tangibiliza conceptos abstractos.</a:t>
             </a:r>
           </a:p>
           <a:p>
             <a:pPr>
               <a:spcBef>
-                <a:spcPts val="1000"/>
+                <a:spcPts val="800"/>
               </a:spcBef>
-              <a:defRPr sz="2000"/>
+              <a:defRPr sz="1800"/>
             </a:pPr>
             <a:r>
-              <a:t>Muestra una estructura de proyecto, dominios y bounded contexts real.</a:t>
+              <a:t>Proporciona código base, pipelines y pruebas reales.</a:t>
             </a:r>
           </a:p>
           <a:p>
             <a:pPr>
               <a:spcBef>
-                <a:spcPts val="1000"/>
+                <a:spcPts val="800"/>
               </a:spcBef>
-              <a:defRPr sz="2000"/>
+              <a:defRPr sz="1800"/>
             </a:pPr>
             <a:r>
-              <a:t>Proporciona ejemplos de código, pruebas y pipelines que funcionan.</a:t>
-            </a:r>
-          </a:p>
-          <a:p>
-            <a:pPr>
-              <a:spcBef>
-                <a:spcPts val="1000"/>
-              </a:spcBef>
-              <a:defRPr sz="2000"/>
-            </a:pPr>
-            <a:r>
-              <a:t>Reduce la curva de aprendizaje de los nuevos equipos.</a:t>
+              <a:t>Sirve de acelerador (plantilla).</a:t>
             </a:r>
           </a:p>
         </p:txBody>
       </p:sp>
       <p:pic>
         <p:nvPicPr>
-          <p:cNvPr id="4" name="Picture 3" descr="visual_1_B.png"/>
+          <p:cNvPr id="4" name="Picture 3" descr="ppt2_slide2.png"/>
           <p:cNvPicPr>
             <a:picLocks noChangeAspect="1"/>
           </p:cNvPicPr>
@@ -3413,8 +3391,8 @@
         </p:blipFill>
         <p:spPr>
           <a:xfrm>
-            <a:off x="4572000" y="3098929"/>
-            <a:ext cx="4114800" cy="1574541"/>
+            <a:off x="4114800" y="3641271"/>
+            <a:ext cx="4572000" cy="489857"/>
           </a:xfrm>
           <a:prstGeom prst="rect">
             <a:avLst/>
@@ -3455,14 +3433,14 @@
           <a:lstStyle/>
           <a:p>
             <a:pPr>
-              <a:defRPr b="1" sz="3600">
+              <a:defRPr>
                 <a:solidFill>
                   <a:srgbClr val="1E3A5F"/>
                 </a:solidFill>
               </a:defRPr>
             </a:pPr>
             <a:r>
-              <a:t>3. Diseño Guiado por Evolith</a:t>
+              <a:t>3. Arquitectura Evolith en UMS</a:t>
             </a:r>
           </a:p>
         </p:txBody>
@@ -3477,53 +3455,70 @@
             <p:ph idx="1"/>
           </p:nvPr>
         </p:nvSpPr>
-        <p:spPr/>
+        <p:spPr>
+          <a:xfrm>
+            <a:ext cx="3840480" cy="0"/>
+          </a:xfrm>
+        </p:spPr>
         <p:txBody>
           <a:bodyPr/>
           <a:lstStyle/>
           <a:p>
             <a:pPr>
-              <a:defRPr sz="2000"/>
+              <a:defRPr sz="1800"/>
             </a:pPr>
             <a:r>
-              <a:t>Organización modular enfocada en Bounded Contexts.</a:t>
+              <a:t>Implementación modular (Bounded Contexts).</a:t>
             </a:r>
           </a:p>
           <a:p>
             <a:pPr>
               <a:spcBef>
-                <a:spcPts val="1000"/>
+                <a:spcPts val="800"/>
               </a:spcBef>
-              <a:defRPr sz="2000"/>
+              <a:defRPr sz="1800"/>
             </a:pPr>
             <a:r>
-              <a:t>Arquitectura en capas / Hexagonal adaptada.</a:t>
+              <a:t>Adaptación de Arquitectura Hexagonal.</a:t>
             </a:r>
           </a:p>
           <a:p>
             <a:pPr>
               <a:spcBef>
-                <a:spcPts val="1000"/>
+                <a:spcPts val="800"/>
               </a:spcBef>
-              <a:defRPr sz="2000"/>
+              <a:defRPr sz="1800"/>
             </a:pPr>
             <a:r>
-              <a:t>Manejo consistente de configuraciones y secretos.</a:t>
-            </a:r>
-          </a:p>
-          <a:p>
-            <a:pPr>
-              <a:spcBef>
-                <a:spcPts val="1000"/>
-              </a:spcBef>
-              <a:defRPr sz="2000"/>
-            </a:pPr>
-            <a:r>
-              <a:t>Separación clara entre capa de red (API) y lógica de dominio.</a:t>
-            </a:r>
-          </a:p>
-        </p:txBody>
-      </p:sp>
+              <a:t>Aislamiento de la lógica de dominio.</a:t>
+            </a:r>
+          </a:p>
+        </p:txBody>
+      </p:sp>
+      <p:pic>
+        <p:nvPicPr>
+          <p:cNvPr id="4" name="Picture 3" descr="ppt2_slide3.png"/>
+          <p:cNvPicPr>
+            <a:picLocks noChangeAspect="1"/>
+          </p:cNvPicPr>
+          <p:nvPr/>
+        </p:nvPicPr>
+        <p:blipFill>
+          <a:blip r:embed="rId2"/>
+          <a:stretch>
+            <a:fillRect/>
+          </a:stretch>
+        </p:blipFill>
+        <p:spPr>
+          <a:xfrm>
+            <a:off x="4114800" y="3004240"/>
+            <a:ext cx="4572000" cy="1763920"/>
+          </a:xfrm>
+          <a:prstGeom prst="rect">
+            <a:avLst/>
+          </a:prstGeom>
+        </p:spPr>
+      </p:pic>
     </p:spTree>
   </p:cSld>
   <p:clrMapOvr>
@@ -3558,14 +3553,14 @@
           <a:lstStyle/>
           <a:p>
             <a:pPr>
-              <a:defRPr b="1" sz="3600">
+              <a:defRPr>
                 <a:solidFill>
                   <a:srgbClr val="1E3A5F"/>
                 </a:solidFill>
               </a:defRPr>
             </a:pPr>
             <a:r>
-              <a:t>4. Implementación y Patrones</a:t>
+              <a:t>4. Patrones Aplicados</a:t>
             </a:r>
           </a:p>
         </p:txBody>
@@ -3580,53 +3575,70 @@
             <p:ph idx="1"/>
           </p:nvPr>
         </p:nvSpPr>
-        <p:spPr/>
+        <p:spPr>
+          <a:xfrm>
+            <a:ext cx="3840480" cy="0"/>
+          </a:xfrm>
+        </p:spPr>
         <p:txBody>
           <a:bodyPr/>
           <a:lstStyle/>
           <a:p>
             <a:pPr>
-              <a:defRPr sz="2000"/>
+              <a:defRPr sz="1800"/>
             </a:pPr>
             <a:r>
-              <a:t>Gestión de Permisos: Auth Graph y control de acceso.</a:t>
+              <a:t>Resolución formal de Autenticación y Autorización.</a:t>
             </a:r>
           </a:p>
           <a:p>
             <a:pPr>
               <a:spcBef>
-                <a:spcPts val="1000"/>
+                <a:spcPts val="800"/>
               </a:spcBef>
-              <a:defRPr sz="2000"/>
+              <a:defRPr sz="1800"/>
             </a:pPr>
             <a:r>
-              <a:t>Perfiles y Roles: Modelado claro de la identidad corporativa.</a:t>
+              <a:t>Manejo avanzado de Auth Graph corporativo.</a:t>
             </a:r>
           </a:p>
           <a:p>
             <a:pPr>
               <a:spcBef>
-                <a:spcPts val="1000"/>
+                <a:spcPts val="800"/>
               </a:spcBef>
-              <a:defRPr sz="2000"/>
+              <a:defRPr sz="1800"/>
             </a:pPr>
             <a:r>
-              <a:t>Multi-tenancy: Preparación para múltiples inquilinos de manera segura.</a:t>
-            </a:r>
-          </a:p>
-          <a:p>
-            <a:pPr>
-              <a:spcBef>
-                <a:spcPts val="1000"/>
-              </a:spcBef>
-              <a:defRPr sz="2000"/>
-            </a:pPr>
-            <a:r>
-              <a:t>Parametrización dinámica sin redespliegues complejos.</a:t>
-            </a:r>
-          </a:p>
-        </p:txBody>
-      </p:sp>
+              <a:t>Parametrización dinámica.</a:t>
+            </a:r>
+          </a:p>
+        </p:txBody>
+      </p:sp>
+      <p:pic>
+        <p:nvPicPr>
+          <p:cNvPr id="4" name="Picture 3" descr="ppt2_slide4.png"/>
+          <p:cNvPicPr>
+            <a:picLocks noChangeAspect="1"/>
+          </p:cNvPicPr>
+          <p:nvPr/>
+        </p:nvPicPr>
+        <p:blipFill>
+          <a:blip r:embed="rId2"/>
+          <a:stretch>
+            <a:fillRect/>
+          </a:stretch>
+        </p:blipFill>
+        <p:spPr>
+          <a:xfrm>
+            <a:off x="4114800" y="3390511"/>
+            <a:ext cx="4572000" cy="991378"/>
+          </a:xfrm>
+          <a:prstGeom prst="rect">
+            <a:avLst/>
+          </a:prstGeom>
+        </p:spPr>
+      </p:pic>
     </p:spTree>
   </p:cSld>
   <p:clrMapOvr>
@@ -3661,14 +3673,14 @@
           <a:lstStyle/>
           <a:p>
             <a:pPr>
-              <a:defRPr b="1" sz="3600">
+              <a:defRPr>
                 <a:solidFill>
                   <a:srgbClr val="1E3A5F"/>
                 </a:solidFill>
               </a:defRPr>
             </a:pPr>
             <a:r>
-              <a:t>5. Trazabilidad en UMS</a:t>
+              <a:t>5. Trazabilidad en la Práctica</a:t>
             </a:r>
           </a:p>
         </p:txBody>
@@ -3683,53 +3695,70 @@
             <p:ph idx="1"/>
           </p:nvPr>
         </p:nvSpPr>
-        <p:spPr/>
+        <p:spPr>
+          <a:xfrm>
+            <a:ext cx="3840480" cy="0"/>
+          </a:xfrm>
+        </p:spPr>
         <p:txBody>
           <a:bodyPr/>
           <a:lstStyle/>
           <a:p>
             <a:pPr>
-              <a:defRPr sz="2000"/>
+              <a:defRPr sz="1800"/>
             </a:pPr>
             <a:r>
-              <a:t>PRDs mapeados a funcionalidades concretas de UMS.</a:t>
+              <a:t>Muestra cómo atar un requerimiento de PRD hasta el código.</a:t>
             </a:r>
           </a:p>
           <a:p>
             <a:pPr>
               <a:spcBef>
-                <a:spcPts val="1000"/>
+                <a:spcPts val="800"/>
               </a:spcBef>
-              <a:defRPr sz="2000"/>
+              <a:defRPr sz="1800"/>
             </a:pPr>
             <a:r>
-              <a:t>ADRs documentando cada decisión de diseño del sistema.</a:t>
+              <a:t>Historias referenciando ADRs.</a:t>
             </a:r>
           </a:p>
           <a:p>
             <a:pPr>
               <a:spcBef>
-                <a:spcPts val="1000"/>
+                <a:spcPts val="800"/>
               </a:spcBef>
-              <a:defRPr sz="2000"/>
+              <a:defRPr sz="1800"/>
             </a:pPr>
             <a:r>
-              <a:t>Historias y commits enlazados a requerimientos de negocio.</a:t>
-            </a:r>
-          </a:p>
-          <a:p>
-            <a:pPr>
-              <a:spcBef>
-                <a:spcPts val="1000"/>
-              </a:spcBef>
-              <a:defRPr sz="2000"/>
-            </a:pPr>
-            <a:r>
-              <a:t>Quality Gates validados mediante Test Summary Reports reales.</a:t>
-            </a:r>
-          </a:p>
-        </p:txBody>
-      </p:sp>
+              <a:t>Evidencia viva.</a:t>
+            </a:r>
+          </a:p>
+        </p:txBody>
+      </p:sp>
+      <p:pic>
+        <p:nvPicPr>
+          <p:cNvPr id="4" name="Picture 3" descr="ppt2_slide5.png"/>
+          <p:cNvPicPr>
+            <a:picLocks noChangeAspect="1"/>
+          </p:cNvPicPr>
+          <p:nvPr/>
+        </p:nvPicPr>
+        <p:blipFill>
+          <a:blip r:embed="rId2"/>
+          <a:stretch>
+            <a:fillRect/>
+          </a:stretch>
+        </p:blipFill>
+        <p:spPr>
+          <a:xfrm>
+            <a:off x="4114800" y="3702503"/>
+            <a:ext cx="4572000" cy="367393"/>
+          </a:xfrm>
+          <a:prstGeom prst="rect">
+            <a:avLst/>
+          </a:prstGeom>
+        </p:spPr>
+      </p:pic>
     </p:spTree>
   </p:cSld>
   <p:clrMapOvr>
@@ -3764,14 +3793,14 @@
           <a:lstStyle/>
           <a:p>
             <a:pPr>
-              <a:defRPr b="1" sz="3600">
+              <a:defRPr>
                 <a:solidFill>
                   <a:srgbClr val="1E3A5F"/>
                 </a:solidFill>
               </a:defRPr>
             </a:pPr>
             <a:r>
-              <a:t>6. Aprendizaje y Retroalimentación</a:t>
+              <a:t>6. El Ciclo de Retroalimentación</a:t>
             </a:r>
           </a:p>
         </p:txBody>
@@ -3786,53 +3815,59 @@
             <p:ph idx="1"/>
           </p:nvPr>
         </p:nvSpPr>
-        <p:spPr/>
+        <p:spPr>
+          <a:xfrm>
+            <a:ext cx="3840480" cy="0"/>
+          </a:xfrm>
+        </p:spPr>
         <p:txBody>
           <a:bodyPr/>
           <a:lstStyle/>
           <a:p>
             <a:pPr>
-              <a:defRPr sz="2000"/>
+              <a:defRPr sz="1800"/>
             </a:pPr>
             <a:r>
-              <a:t>Lecciones de UMS alimentan de vuelta los estándares de Evolith.</a:t>
+              <a:t>Los aprendizajes en UMS se promueven.</a:t>
             </a:r>
           </a:p>
           <a:p>
             <a:pPr>
               <a:spcBef>
-                <a:spcPts val="1000"/>
+                <a:spcPts val="800"/>
               </a:spcBef>
-              <a:defRPr sz="2000"/>
+              <a:defRPr sz="1800"/>
             </a:pPr>
             <a:r>
-              <a:t>Identificación de fricciones en el SDLC corporativo.</a:t>
-            </a:r>
-          </a:p>
-          <a:p>
-            <a:pPr>
-              <a:spcBef>
-                <a:spcPts val="1000"/>
-              </a:spcBef>
-              <a:defRPr sz="2000"/>
-            </a:pPr>
-            <a:r>
-              <a:t>Descubrimiento de nuevos patrones reutilizables (ej. Auth).</a:t>
-            </a:r>
-          </a:p>
-          <a:p>
-            <a:pPr>
-              <a:spcBef>
-                <a:spcPts val="1000"/>
-              </a:spcBef>
-              <a:defRPr sz="2000"/>
-            </a:pPr>
-            <a:r>
-              <a:t>Evolución continua de las plantillas basadas en uso empírico.</a:t>
-            </a:r>
-          </a:p>
-        </p:txBody>
-      </p:sp>
+              <a:t>Las mejoras técnicas locales suben a Evolith como estándares corporativos.</a:t>
+            </a:r>
+          </a:p>
+        </p:txBody>
+      </p:sp>
+      <p:pic>
+        <p:nvPicPr>
+          <p:cNvPr id="4" name="Picture 3" descr="ppt2_slide6.png"/>
+          <p:cNvPicPr>
+            <a:picLocks noChangeAspect="1"/>
+          </p:cNvPicPr>
+          <p:nvPr/>
+        </p:nvPicPr>
+        <p:blipFill>
+          <a:blip r:embed="rId2"/>
+          <a:stretch>
+            <a:fillRect/>
+          </a:stretch>
+        </p:blipFill>
+        <p:spPr>
+          <a:xfrm>
+            <a:off x="4114800" y="3466016"/>
+            <a:ext cx="4572000" cy="840368"/>
+          </a:xfrm>
+          <a:prstGeom prst="rect">
+            <a:avLst/>
+          </a:prstGeom>
+        </p:spPr>
+      </p:pic>
     </p:spTree>
   </p:cSld>
   <p:clrMapOvr>
@@ -3867,14 +3902,14 @@
           <a:lstStyle/>
           <a:p>
             <a:pPr>
-              <a:defRPr b="1" sz="3600">
+              <a:defRPr>
                 <a:solidFill>
                   <a:srgbClr val="1E3A5F"/>
                 </a:solidFill>
               </a:defRPr>
             </a:pPr>
             <a:r>
-              <a:t>7. Valor para Futuras Aplicaciones</a:t>
+              <a:t>7. Adopción para el Futuro</a:t>
             </a:r>
           </a:p>
         </p:txBody>
@@ -3889,53 +3924,70 @@
             <p:ph idx="1"/>
           </p:nvPr>
         </p:nvSpPr>
-        <p:spPr/>
+        <p:spPr>
+          <a:xfrm>
+            <a:ext cx="3840480" cy="0"/>
+          </a:xfrm>
+        </p:spPr>
         <p:txBody>
           <a:bodyPr/>
           <a:lstStyle/>
           <a:p>
             <a:pPr>
-              <a:defRPr sz="2000"/>
+              <a:defRPr sz="1800"/>
             </a:pPr>
             <a:r>
-              <a:t>Plantilla de inicio rápida (Bootstrapping).</a:t>
+              <a:t>Start rápido para nuevos equipos.</a:t>
             </a:r>
           </a:p>
           <a:p>
             <a:pPr>
               <a:spcBef>
-                <a:spcPts val="1000"/>
+                <a:spcPts val="800"/>
               </a:spcBef>
-              <a:defRPr sz="2000"/>
+              <a:defRPr sz="1800"/>
             </a:pPr>
             <a:r>
-              <a:t>Menos decisiones técnicas que tomar (decisiones ya tomadas en ADRs).</a:t>
+              <a:t>Menos fricción de andamiaje.</a:t>
             </a:r>
           </a:p>
           <a:p>
             <a:pPr>
               <a:spcBef>
-                <a:spcPts val="1000"/>
+                <a:spcPts val="800"/>
               </a:spcBef>
-              <a:defRPr sz="2000"/>
+              <a:defRPr sz="1800"/>
             </a:pPr>
             <a:r>
-              <a:t>Framework SDLC pre-configurado (Pipelines, Linting, Testing).</a:t>
-            </a:r>
-          </a:p>
-          <a:p>
-            <a:pPr>
-              <a:spcBef>
-                <a:spcPts val="1000"/>
-              </a:spcBef>
-              <a:defRPr sz="2000"/>
-            </a:pPr>
-            <a:r>
-              <a:t>Mayor enfoque en el valor de negocio, menor esfuerzo en andamiaje.</a:t>
-            </a:r>
-          </a:p>
-        </p:txBody>
-      </p:sp>
+              <a:t>Mayor tiempo enfocado en valor de negocio.</a:t>
+            </a:r>
+          </a:p>
+        </p:txBody>
+      </p:sp>
+      <p:pic>
+        <p:nvPicPr>
+          <p:cNvPr id="4" name="Picture 3" descr="ppt2_slide7.png"/>
+          <p:cNvPicPr>
+            <a:picLocks noChangeAspect="1"/>
+          </p:cNvPicPr>
+          <p:nvPr/>
+        </p:nvPicPr>
+        <p:blipFill>
+          <a:blip r:embed="rId2"/>
+          <a:stretch>
+            <a:fillRect/>
+          </a:stretch>
+        </p:blipFill>
+        <p:spPr>
+          <a:xfrm>
+            <a:off x="4114800" y="2240280"/>
+            <a:ext cx="4572000" cy="3291840"/>
+          </a:xfrm>
+          <a:prstGeom prst="rect">
+            <a:avLst/>
+          </a:prstGeom>
+        </p:spPr>
+      </p:pic>
     </p:spTree>
   </p:cSld>
   <p:clrMapOvr>

--- a/reference/governance/sdlc/assets/ums-evolith-reference-executive-deck.pptx
+++ b/reference/governance/sdlc/assets/ums-evolith-reference-executive-deck.pptx
@@ -14,7 +14,7 @@
     <p:sldId id="262" r:id="rId13"/>
     <p:sldId id="263" r:id="rId14"/>
   </p:sldIdLst>
-  <p:sldSz cx="9144000" cy="6858000" type="screen4x3"/>
+  <p:sldSz cx="12191695" cy="6858000" type="screen4x3"/>
   <p:notesSz cx="6858000" cy="9144000"/>
   <p:defaultTextStyle>
     <a:defPPr>
@@ -3088,14 +3088,6 @@
 <file path=ppt/slides/slide1.xml><?xml version="1.0" encoding="utf-8"?>
 <p:sld xmlns:a="http://schemas.openxmlformats.org/drawingml/2006/main" xmlns:p="http://schemas.openxmlformats.org/presentationml/2006/main" xmlns:r="http://schemas.openxmlformats.org/officeDocument/2006/relationships">
   <p:cSld>
-    <p:bg>
-      <p:bgPr>
-        <a:solidFill>
-          <a:srgbClr val="1E3A5F"/>
-        </a:solidFill>
-        <a:effectLst/>
-      </p:bgPr>
-    </p:bg>
     <p:spTree>
       <p:nvGrpSpPr>
         <p:cNvPr id="1" name=""/>
@@ -3105,21 +3097,118 @@
       <p:grpSpPr/>
       <p:sp>
         <p:nvSpPr>
-          <p:cNvPr id="2" name="Title 1"/>
-          <p:cNvSpPr>
-            <a:spLocks noGrp="1"/>
-          </p:cNvSpPr>
-          <p:nvPr>
-            <p:ph type="ctrTitle"/>
-          </p:nvPr>
-        </p:nvSpPr>
-        <p:spPr/>
-        <p:txBody>
-          <a:bodyPr/>
+          <p:cNvPr id="2" name="Rectangle 1"/>
+          <p:cNvSpPr/>
+          <p:nvPr/>
+        </p:nvSpPr>
+        <p:spPr>
+          <a:xfrm>
+            <a:off x="0" y="0"/>
+            <a:ext cx="12191695" cy="6858000"/>
+          </a:xfrm>
+          <a:prstGeom prst="rect">
+            <a:avLst/>
+          </a:prstGeom>
+          <a:solidFill>
+            <a:srgbClr val="1E3A5F"/>
+          </a:solidFill>
+          <a:ln>
+            <a:solidFill>
+              <a:srgbClr val="1E3A5F"/>
+            </a:solidFill>
+          </a:ln>
+        </p:spPr>
+        <p:style>
+          <a:lnRef idx="1">
+            <a:schemeClr val="accent1"/>
+          </a:lnRef>
+          <a:fillRef idx="3">
+            <a:schemeClr val="accent1"/>
+          </a:fillRef>
+          <a:effectRef idx="2">
+            <a:schemeClr val="accent1"/>
+          </a:effectRef>
+          <a:fontRef idx="minor">
+            <a:schemeClr val="lt1"/>
+          </a:fontRef>
+        </p:style>
+        <p:txBody>
+          <a:bodyPr rtlCol="0" anchor="ctr"/>
+          <a:lstStyle/>
+          <a:p>
+            <a:pPr algn="ctr"/>
+          </a:p>
+        </p:txBody>
+      </p:sp>
+      <p:sp>
+        <p:nvSpPr>
+          <p:cNvPr id="3" name="Rectangle 2"/>
+          <p:cNvSpPr/>
+          <p:nvPr/>
+        </p:nvSpPr>
+        <p:spPr>
+          <a:xfrm>
+            <a:off x="0" y="6400800"/>
+            <a:ext cx="12191695" cy="457200"/>
+          </a:xfrm>
+          <a:prstGeom prst="rect">
+            <a:avLst/>
+          </a:prstGeom>
+          <a:solidFill>
+            <a:srgbClr val="3B82F6"/>
+          </a:solidFill>
+          <a:ln>
+            <a:solidFill>
+              <a:srgbClr val="3B82F6"/>
+            </a:solidFill>
+          </a:ln>
+        </p:spPr>
+        <p:style>
+          <a:lnRef idx="1">
+            <a:schemeClr val="accent1"/>
+          </a:lnRef>
+          <a:fillRef idx="3">
+            <a:schemeClr val="accent1"/>
+          </a:fillRef>
+          <a:effectRef idx="2">
+            <a:schemeClr val="accent1"/>
+          </a:effectRef>
+          <a:fontRef idx="minor">
+            <a:schemeClr val="lt1"/>
+          </a:fontRef>
+        </p:style>
+        <p:txBody>
+          <a:bodyPr rtlCol="0" anchor="ctr"/>
+          <a:lstStyle/>
+          <a:p>
+            <a:pPr algn="ctr"/>
+          </a:p>
+        </p:txBody>
+      </p:sp>
+      <p:sp>
+        <p:nvSpPr>
+          <p:cNvPr id="4" name="TextBox 3"/>
+          <p:cNvSpPr txBox="1"/>
+          <p:nvPr/>
+        </p:nvSpPr>
+        <p:spPr>
+          <a:xfrm>
+            <a:off x="914400" y="2286000"/>
+            <a:ext cx="10362895" cy="1828800"/>
+          </a:xfrm>
+          <a:prstGeom prst="rect">
+            <a:avLst/>
+          </a:prstGeom>
+          <a:noFill/>
+        </p:spPr>
+        <p:txBody>
+          <a:bodyPr wrap="square">
+            <a:spAutoFit/>
+          </a:bodyPr>
           <a:lstStyle/>
           <a:p>
             <a:pPr>
-              <a:defRPr b="1">
+              <a:defRPr b="1" sz="5400">
                 <a:solidFill>
                   <a:srgbClr val="FFFFFF"/>
                 </a:solidFill>
@@ -3129,25 +3218,12 @@
               <a:t>Caso UMS sobre Evolith</a:t>
             </a:r>
           </a:p>
-        </p:txBody>
-      </p:sp>
-      <p:sp>
-        <p:nvSpPr>
-          <p:cNvPr id="3" name="Subtitle 2"/>
-          <p:cNvSpPr>
-            <a:spLocks noGrp="1"/>
-          </p:cNvSpPr>
-          <p:nvPr>
-            <p:ph type="subTitle" idx="1"/>
-          </p:nvPr>
-        </p:nvSpPr>
-        <p:spPr/>
-        <p:txBody>
-          <a:bodyPr/>
-          <a:lstStyle/>
           <a:p>
             <a:pPr>
-              <a:defRPr>
+              <a:spcBef>
+                <a:spcPts val="1400"/>
+              </a:spcBef>
+              <a:defRPr sz="2800">
                 <a:solidFill>
                   <a:srgbClr val="3B82F6"/>
                 </a:solidFill>
@@ -3179,23 +3255,120 @@
       <p:grpSpPr/>
       <p:sp>
         <p:nvSpPr>
-          <p:cNvPr id="2" name="Title 1"/>
-          <p:cNvSpPr>
-            <a:spLocks noGrp="1"/>
-          </p:cNvSpPr>
-          <p:nvPr>
-            <p:ph type="title"/>
-          </p:nvPr>
-        </p:nvSpPr>
-        <p:spPr/>
-        <p:txBody>
-          <a:bodyPr/>
+          <p:cNvPr id="2" name="Rectangle 1"/>
+          <p:cNvSpPr/>
+          <p:nvPr/>
+        </p:nvSpPr>
+        <p:spPr>
+          <a:xfrm>
+            <a:off x="0" y="0"/>
+            <a:ext cx="12191695" cy="1097280"/>
+          </a:xfrm>
+          <a:prstGeom prst="rect">
+            <a:avLst/>
+          </a:prstGeom>
+          <a:solidFill>
+            <a:srgbClr val="1E3A5F"/>
+          </a:solidFill>
+          <a:ln>
+            <a:solidFill>
+              <a:srgbClr val="1E3A5F"/>
+            </a:solidFill>
+          </a:ln>
+        </p:spPr>
+        <p:style>
+          <a:lnRef idx="1">
+            <a:schemeClr val="accent1"/>
+          </a:lnRef>
+          <a:fillRef idx="3">
+            <a:schemeClr val="accent1"/>
+          </a:fillRef>
+          <a:effectRef idx="2">
+            <a:schemeClr val="accent1"/>
+          </a:effectRef>
+          <a:fontRef idx="minor">
+            <a:schemeClr val="lt1"/>
+          </a:fontRef>
+        </p:style>
+        <p:txBody>
+          <a:bodyPr rtlCol="0" anchor="ctr"/>
+          <a:lstStyle/>
+          <a:p>
+            <a:pPr algn="ctr"/>
+          </a:p>
+        </p:txBody>
+      </p:sp>
+      <p:sp>
+        <p:nvSpPr>
+          <p:cNvPr id="3" name="Rectangle 2"/>
+          <p:cNvSpPr/>
+          <p:nvPr/>
+        </p:nvSpPr>
+        <p:spPr>
+          <a:xfrm>
+            <a:off x="0" y="1097280"/>
+            <a:ext cx="12191695" cy="91440"/>
+          </a:xfrm>
+          <a:prstGeom prst="rect">
+            <a:avLst/>
+          </a:prstGeom>
+          <a:solidFill>
+            <a:srgbClr val="3B82F6"/>
+          </a:solidFill>
+          <a:ln>
+            <a:solidFill>
+              <a:srgbClr val="3B82F6"/>
+            </a:solidFill>
+          </a:ln>
+        </p:spPr>
+        <p:style>
+          <a:lnRef idx="1">
+            <a:schemeClr val="accent1"/>
+          </a:lnRef>
+          <a:fillRef idx="3">
+            <a:schemeClr val="accent1"/>
+          </a:fillRef>
+          <a:effectRef idx="2">
+            <a:schemeClr val="accent1"/>
+          </a:effectRef>
+          <a:fontRef idx="minor">
+            <a:schemeClr val="lt1"/>
+          </a:fontRef>
+        </p:style>
+        <p:txBody>
+          <a:bodyPr rtlCol="0" anchor="ctr"/>
+          <a:lstStyle/>
+          <a:p>
+            <a:pPr algn="ctr"/>
+          </a:p>
+        </p:txBody>
+      </p:sp>
+      <p:sp>
+        <p:nvSpPr>
+          <p:cNvPr id="4" name="TextBox 3"/>
+          <p:cNvSpPr txBox="1"/>
+          <p:nvPr/>
+        </p:nvSpPr>
+        <p:spPr>
+          <a:xfrm>
+            <a:off x="457200" y="91440"/>
+            <a:ext cx="11277295" cy="914400"/>
+          </a:xfrm>
+          <a:prstGeom prst="rect">
+            <a:avLst/>
+          </a:prstGeom>
+          <a:noFill/>
+        </p:spPr>
+        <p:txBody>
+          <a:bodyPr wrap="none">
+            <a:spAutoFit/>
+          </a:bodyPr>
           <a:lstStyle/>
           <a:p>
             <a:pPr>
-              <a:defRPr>
+              <a:defRPr b="1" sz="3600">
                 <a:solidFill>
-                  <a:srgbClr val="1E3A5F"/>
+                  <a:srgbClr val="FFFFFF"/>
                 </a:solidFill>
               </a:defRPr>
             </a:pPr>
@@ -3207,25 +3380,32 @@
       </p:sp>
       <p:sp>
         <p:nvSpPr>
-          <p:cNvPr id="3" name="Content Placeholder 2"/>
-          <p:cNvSpPr>
-            <a:spLocks noGrp="1"/>
-          </p:cNvSpPr>
-          <p:nvPr>
-            <p:ph idx="1"/>
-          </p:nvPr>
-        </p:nvSpPr>
-        <p:spPr>
-          <a:xfrm>
-            <a:ext cx="3840480" cy="0"/>
-          </a:xfrm>
-        </p:spPr>
-        <p:txBody>
-          <a:bodyPr/>
+          <p:cNvPr id="5" name="TextBox 4"/>
+          <p:cNvSpPr txBox="1"/>
+          <p:nvPr/>
+        </p:nvSpPr>
+        <p:spPr>
+          <a:xfrm>
+            <a:off x="457200" y="1645920"/>
+            <a:ext cx="4114800" cy="4572000"/>
+          </a:xfrm>
+          <a:prstGeom prst="rect">
+            <a:avLst/>
+          </a:prstGeom>
+          <a:noFill/>
+        </p:spPr>
+        <p:txBody>
+          <a:bodyPr wrap="square">
+            <a:spAutoFit/>
+          </a:bodyPr>
           <a:lstStyle/>
           <a:p>
             <a:pPr>
-              <a:defRPr sz="1800"/>
+              <a:defRPr sz="2200">
+                <a:solidFill>
+                  <a:srgbClr val="323232"/>
+                </a:solidFill>
+              </a:defRPr>
             </a:pPr>
             <a:r>
               <a:t>User Management System corporativo.</a:t>
@@ -3234,30 +3414,38 @@
           <a:p>
             <a:pPr>
               <a:spcBef>
-                <a:spcPts val="800"/>
+                <a:spcPts val="1400"/>
               </a:spcBef>
-              <a:defRPr sz="1800"/>
+              <a:defRPr sz="2200">
+                <a:solidFill>
+                  <a:srgbClr val="323232"/>
+                </a:solidFill>
+              </a:defRPr>
             </a:pPr>
             <a:r>
-              <a:t>Instanciación real de las reglas de Evolith.</a:t>
+              <a:t>• Instanciación real de las reglas de Evolith.</a:t>
             </a:r>
           </a:p>
           <a:p>
             <a:pPr>
               <a:spcBef>
-                <a:spcPts val="800"/>
+                <a:spcPts val="1400"/>
               </a:spcBef>
-              <a:defRPr sz="1800"/>
+              <a:defRPr sz="2200">
+                <a:solidFill>
+                  <a:srgbClr val="323232"/>
+                </a:solidFill>
+              </a:defRPr>
             </a:pPr>
             <a:r>
-              <a:t>Demuestra viabilidad técnica.</a:t>
+              <a:t>• Demuestra viabilidad técnica.</a:t>
             </a:r>
           </a:p>
         </p:txBody>
       </p:sp>
       <p:pic>
         <p:nvPicPr>
-          <p:cNvPr id="4" name="Picture 3" descr="ppt2_slide1.png"/>
+          <p:cNvPr id="6" name="Picture 5" descr="ppt2_slide1.png"/>
           <p:cNvPicPr>
             <a:picLocks noChangeAspect="1"/>
           </p:cNvPicPr>
@@ -3271,8 +3459,8 @@
         </p:blipFill>
         <p:spPr>
           <a:xfrm>
-            <a:off x="4114800" y="3046444"/>
-            <a:ext cx="4572000" cy="1679510"/>
+            <a:off x="5029200" y="1645920"/>
+            <a:ext cx="6583680" cy="2418495"/>
           </a:xfrm>
           <a:prstGeom prst="rect">
             <a:avLst/>
@@ -3299,23 +3487,120 @@
       <p:grpSpPr/>
       <p:sp>
         <p:nvSpPr>
-          <p:cNvPr id="2" name="Title 1"/>
-          <p:cNvSpPr>
-            <a:spLocks noGrp="1"/>
-          </p:cNvSpPr>
-          <p:nvPr>
-            <p:ph type="title"/>
-          </p:nvPr>
-        </p:nvSpPr>
-        <p:spPr/>
-        <p:txBody>
-          <a:bodyPr/>
+          <p:cNvPr id="2" name="Rectangle 1"/>
+          <p:cNvSpPr/>
+          <p:nvPr/>
+        </p:nvSpPr>
+        <p:spPr>
+          <a:xfrm>
+            <a:off x="0" y="0"/>
+            <a:ext cx="12191695" cy="1097280"/>
+          </a:xfrm>
+          <a:prstGeom prst="rect">
+            <a:avLst/>
+          </a:prstGeom>
+          <a:solidFill>
+            <a:srgbClr val="1E3A5F"/>
+          </a:solidFill>
+          <a:ln>
+            <a:solidFill>
+              <a:srgbClr val="1E3A5F"/>
+            </a:solidFill>
+          </a:ln>
+        </p:spPr>
+        <p:style>
+          <a:lnRef idx="1">
+            <a:schemeClr val="accent1"/>
+          </a:lnRef>
+          <a:fillRef idx="3">
+            <a:schemeClr val="accent1"/>
+          </a:fillRef>
+          <a:effectRef idx="2">
+            <a:schemeClr val="accent1"/>
+          </a:effectRef>
+          <a:fontRef idx="minor">
+            <a:schemeClr val="lt1"/>
+          </a:fontRef>
+        </p:style>
+        <p:txBody>
+          <a:bodyPr rtlCol="0" anchor="ctr"/>
+          <a:lstStyle/>
+          <a:p>
+            <a:pPr algn="ctr"/>
+          </a:p>
+        </p:txBody>
+      </p:sp>
+      <p:sp>
+        <p:nvSpPr>
+          <p:cNvPr id="3" name="Rectangle 2"/>
+          <p:cNvSpPr/>
+          <p:nvPr/>
+        </p:nvSpPr>
+        <p:spPr>
+          <a:xfrm>
+            <a:off x="0" y="1097280"/>
+            <a:ext cx="12191695" cy="91440"/>
+          </a:xfrm>
+          <a:prstGeom prst="rect">
+            <a:avLst/>
+          </a:prstGeom>
+          <a:solidFill>
+            <a:srgbClr val="3B82F6"/>
+          </a:solidFill>
+          <a:ln>
+            <a:solidFill>
+              <a:srgbClr val="3B82F6"/>
+            </a:solidFill>
+          </a:ln>
+        </p:spPr>
+        <p:style>
+          <a:lnRef idx="1">
+            <a:schemeClr val="accent1"/>
+          </a:lnRef>
+          <a:fillRef idx="3">
+            <a:schemeClr val="accent1"/>
+          </a:fillRef>
+          <a:effectRef idx="2">
+            <a:schemeClr val="accent1"/>
+          </a:effectRef>
+          <a:fontRef idx="minor">
+            <a:schemeClr val="lt1"/>
+          </a:fontRef>
+        </p:style>
+        <p:txBody>
+          <a:bodyPr rtlCol="0" anchor="ctr"/>
+          <a:lstStyle/>
+          <a:p>
+            <a:pPr algn="ctr"/>
+          </a:p>
+        </p:txBody>
+      </p:sp>
+      <p:sp>
+        <p:nvSpPr>
+          <p:cNvPr id="4" name="TextBox 3"/>
+          <p:cNvSpPr txBox="1"/>
+          <p:nvPr/>
+        </p:nvSpPr>
+        <p:spPr>
+          <a:xfrm>
+            <a:off x="457200" y="91440"/>
+            <a:ext cx="11277295" cy="914400"/>
+          </a:xfrm>
+          <a:prstGeom prst="rect">
+            <a:avLst/>
+          </a:prstGeom>
+          <a:noFill/>
+        </p:spPr>
+        <p:txBody>
+          <a:bodyPr wrap="none">
+            <a:spAutoFit/>
+          </a:bodyPr>
           <a:lstStyle/>
           <a:p>
             <a:pPr>
-              <a:defRPr>
+              <a:defRPr b="1" sz="3600">
                 <a:solidFill>
-                  <a:srgbClr val="1E3A5F"/>
+                  <a:srgbClr val="FFFFFF"/>
                 </a:solidFill>
               </a:defRPr>
             </a:pPr>
@@ -3327,25 +3612,32 @@
       </p:sp>
       <p:sp>
         <p:nvSpPr>
-          <p:cNvPr id="3" name="Content Placeholder 2"/>
-          <p:cNvSpPr>
-            <a:spLocks noGrp="1"/>
-          </p:cNvSpPr>
-          <p:nvPr>
-            <p:ph idx="1"/>
-          </p:nvPr>
-        </p:nvSpPr>
-        <p:spPr>
-          <a:xfrm>
-            <a:ext cx="3840480" cy="0"/>
-          </a:xfrm>
-        </p:spPr>
-        <p:txBody>
-          <a:bodyPr/>
+          <p:cNvPr id="5" name="TextBox 4"/>
+          <p:cNvSpPr txBox="1"/>
+          <p:nvPr/>
+        </p:nvSpPr>
+        <p:spPr>
+          <a:xfrm>
+            <a:off x="457200" y="1645920"/>
+            <a:ext cx="4114800" cy="4572000"/>
+          </a:xfrm>
+          <a:prstGeom prst="rect">
+            <a:avLst/>
+          </a:prstGeom>
+          <a:noFill/>
+        </p:spPr>
+        <p:txBody>
+          <a:bodyPr wrap="square">
+            <a:spAutoFit/>
+          </a:bodyPr>
           <a:lstStyle/>
           <a:p>
             <a:pPr>
-              <a:defRPr sz="1800"/>
+              <a:defRPr sz="2200">
+                <a:solidFill>
+                  <a:srgbClr val="323232"/>
+                </a:solidFill>
+              </a:defRPr>
             </a:pPr>
             <a:r>
               <a:t>Tangibiliza conceptos abstractos.</a:t>
@@ -3354,30 +3646,38 @@
           <a:p>
             <a:pPr>
               <a:spcBef>
-                <a:spcPts val="800"/>
+                <a:spcPts val="1400"/>
               </a:spcBef>
-              <a:defRPr sz="1800"/>
+              <a:defRPr sz="2200">
+                <a:solidFill>
+                  <a:srgbClr val="323232"/>
+                </a:solidFill>
+              </a:defRPr>
             </a:pPr>
             <a:r>
-              <a:t>Proporciona código base, pipelines y pruebas reales.</a:t>
+              <a:t>• Proporciona código base, pipelines y pruebas reales.</a:t>
             </a:r>
           </a:p>
           <a:p>
             <a:pPr>
               <a:spcBef>
-                <a:spcPts val="800"/>
+                <a:spcPts val="1400"/>
               </a:spcBef>
-              <a:defRPr sz="1800"/>
+              <a:defRPr sz="2200">
+                <a:solidFill>
+                  <a:srgbClr val="323232"/>
+                </a:solidFill>
+              </a:defRPr>
             </a:pPr>
             <a:r>
-              <a:t>Sirve de acelerador (plantilla).</a:t>
+              <a:t>• Sirve de acelerador (plantilla).</a:t>
             </a:r>
           </a:p>
         </p:txBody>
       </p:sp>
       <p:pic>
         <p:nvPicPr>
-          <p:cNvPr id="4" name="Picture 3" descr="ppt2_slide2.png"/>
+          <p:cNvPr id="6" name="Picture 5" descr="ppt2_slide2.png"/>
           <p:cNvPicPr>
             <a:picLocks noChangeAspect="1"/>
           </p:cNvPicPr>
@@ -3391,8 +3691,8 @@
         </p:blipFill>
         <p:spPr>
           <a:xfrm>
-            <a:off x="4114800" y="3641271"/>
-            <a:ext cx="4572000" cy="489857"/>
+            <a:off x="5029200" y="1645920"/>
+            <a:ext cx="6583680" cy="705394"/>
           </a:xfrm>
           <a:prstGeom prst="rect">
             <a:avLst/>
@@ -3419,23 +3719,120 @@
       <p:grpSpPr/>
       <p:sp>
         <p:nvSpPr>
-          <p:cNvPr id="2" name="Title 1"/>
-          <p:cNvSpPr>
-            <a:spLocks noGrp="1"/>
-          </p:cNvSpPr>
-          <p:nvPr>
-            <p:ph type="title"/>
-          </p:nvPr>
-        </p:nvSpPr>
-        <p:spPr/>
-        <p:txBody>
-          <a:bodyPr/>
+          <p:cNvPr id="2" name="Rectangle 1"/>
+          <p:cNvSpPr/>
+          <p:nvPr/>
+        </p:nvSpPr>
+        <p:spPr>
+          <a:xfrm>
+            <a:off x="0" y="0"/>
+            <a:ext cx="12191695" cy="1097280"/>
+          </a:xfrm>
+          <a:prstGeom prst="rect">
+            <a:avLst/>
+          </a:prstGeom>
+          <a:solidFill>
+            <a:srgbClr val="1E3A5F"/>
+          </a:solidFill>
+          <a:ln>
+            <a:solidFill>
+              <a:srgbClr val="1E3A5F"/>
+            </a:solidFill>
+          </a:ln>
+        </p:spPr>
+        <p:style>
+          <a:lnRef idx="1">
+            <a:schemeClr val="accent1"/>
+          </a:lnRef>
+          <a:fillRef idx="3">
+            <a:schemeClr val="accent1"/>
+          </a:fillRef>
+          <a:effectRef idx="2">
+            <a:schemeClr val="accent1"/>
+          </a:effectRef>
+          <a:fontRef idx="minor">
+            <a:schemeClr val="lt1"/>
+          </a:fontRef>
+        </p:style>
+        <p:txBody>
+          <a:bodyPr rtlCol="0" anchor="ctr"/>
+          <a:lstStyle/>
+          <a:p>
+            <a:pPr algn="ctr"/>
+          </a:p>
+        </p:txBody>
+      </p:sp>
+      <p:sp>
+        <p:nvSpPr>
+          <p:cNvPr id="3" name="Rectangle 2"/>
+          <p:cNvSpPr/>
+          <p:nvPr/>
+        </p:nvSpPr>
+        <p:spPr>
+          <a:xfrm>
+            <a:off x="0" y="1097280"/>
+            <a:ext cx="12191695" cy="91440"/>
+          </a:xfrm>
+          <a:prstGeom prst="rect">
+            <a:avLst/>
+          </a:prstGeom>
+          <a:solidFill>
+            <a:srgbClr val="3B82F6"/>
+          </a:solidFill>
+          <a:ln>
+            <a:solidFill>
+              <a:srgbClr val="3B82F6"/>
+            </a:solidFill>
+          </a:ln>
+        </p:spPr>
+        <p:style>
+          <a:lnRef idx="1">
+            <a:schemeClr val="accent1"/>
+          </a:lnRef>
+          <a:fillRef idx="3">
+            <a:schemeClr val="accent1"/>
+          </a:fillRef>
+          <a:effectRef idx="2">
+            <a:schemeClr val="accent1"/>
+          </a:effectRef>
+          <a:fontRef idx="minor">
+            <a:schemeClr val="lt1"/>
+          </a:fontRef>
+        </p:style>
+        <p:txBody>
+          <a:bodyPr rtlCol="0" anchor="ctr"/>
+          <a:lstStyle/>
+          <a:p>
+            <a:pPr algn="ctr"/>
+          </a:p>
+        </p:txBody>
+      </p:sp>
+      <p:sp>
+        <p:nvSpPr>
+          <p:cNvPr id="4" name="TextBox 3"/>
+          <p:cNvSpPr txBox="1"/>
+          <p:nvPr/>
+        </p:nvSpPr>
+        <p:spPr>
+          <a:xfrm>
+            <a:off x="457200" y="91440"/>
+            <a:ext cx="11277295" cy="914400"/>
+          </a:xfrm>
+          <a:prstGeom prst="rect">
+            <a:avLst/>
+          </a:prstGeom>
+          <a:noFill/>
+        </p:spPr>
+        <p:txBody>
+          <a:bodyPr wrap="none">
+            <a:spAutoFit/>
+          </a:bodyPr>
           <a:lstStyle/>
           <a:p>
             <a:pPr>
-              <a:defRPr>
+              <a:defRPr b="1" sz="3600">
                 <a:solidFill>
-                  <a:srgbClr val="1E3A5F"/>
+                  <a:srgbClr val="FFFFFF"/>
                 </a:solidFill>
               </a:defRPr>
             </a:pPr>
@@ -3447,25 +3844,32 @@
       </p:sp>
       <p:sp>
         <p:nvSpPr>
-          <p:cNvPr id="3" name="Content Placeholder 2"/>
-          <p:cNvSpPr>
-            <a:spLocks noGrp="1"/>
-          </p:cNvSpPr>
-          <p:nvPr>
-            <p:ph idx="1"/>
-          </p:nvPr>
-        </p:nvSpPr>
-        <p:spPr>
-          <a:xfrm>
-            <a:ext cx="3840480" cy="0"/>
-          </a:xfrm>
-        </p:spPr>
-        <p:txBody>
-          <a:bodyPr/>
+          <p:cNvPr id="5" name="TextBox 4"/>
+          <p:cNvSpPr txBox="1"/>
+          <p:nvPr/>
+        </p:nvSpPr>
+        <p:spPr>
+          <a:xfrm>
+            <a:off x="457200" y="1645920"/>
+            <a:ext cx="4114800" cy="4572000"/>
+          </a:xfrm>
+          <a:prstGeom prst="rect">
+            <a:avLst/>
+          </a:prstGeom>
+          <a:noFill/>
+        </p:spPr>
+        <p:txBody>
+          <a:bodyPr wrap="square">
+            <a:spAutoFit/>
+          </a:bodyPr>
           <a:lstStyle/>
           <a:p>
             <a:pPr>
-              <a:defRPr sz="1800"/>
+              <a:defRPr sz="2200">
+                <a:solidFill>
+                  <a:srgbClr val="323232"/>
+                </a:solidFill>
+              </a:defRPr>
             </a:pPr>
             <a:r>
               <a:t>Implementación modular (Bounded Contexts).</a:t>
@@ -3474,30 +3878,38 @@
           <a:p>
             <a:pPr>
               <a:spcBef>
-                <a:spcPts val="800"/>
+                <a:spcPts val="1400"/>
               </a:spcBef>
-              <a:defRPr sz="1800"/>
+              <a:defRPr sz="2200">
+                <a:solidFill>
+                  <a:srgbClr val="323232"/>
+                </a:solidFill>
+              </a:defRPr>
             </a:pPr>
             <a:r>
-              <a:t>Adaptación de Arquitectura Hexagonal.</a:t>
+              <a:t>• Adaptación de Arquitectura Hexagonal.</a:t>
             </a:r>
           </a:p>
           <a:p>
             <a:pPr>
               <a:spcBef>
-                <a:spcPts val="800"/>
+                <a:spcPts val="1400"/>
               </a:spcBef>
-              <a:defRPr sz="1800"/>
+              <a:defRPr sz="2200">
+                <a:solidFill>
+                  <a:srgbClr val="323232"/>
+                </a:solidFill>
+              </a:defRPr>
             </a:pPr>
             <a:r>
-              <a:t>Aislamiento de la lógica de dominio.</a:t>
+              <a:t>• Aislamiento de la lógica de dominio.</a:t>
             </a:r>
           </a:p>
         </p:txBody>
       </p:sp>
       <p:pic>
         <p:nvPicPr>
-          <p:cNvPr id="4" name="Picture 3" descr="ppt2_slide3.png"/>
+          <p:cNvPr id="6" name="Picture 5" descr="ppt2_slide3.png"/>
           <p:cNvPicPr>
             <a:picLocks noChangeAspect="1"/>
           </p:cNvPicPr>
@@ -3511,8 +3923,8 @@
         </p:blipFill>
         <p:spPr>
           <a:xfrm>
-            <a:off x="4114800" y="3004240"/>
-            <a:ext cx="4572000" cy="1763920"/>
+            <a:off x="5029200" y="1645920"/>
+            <a:ext cx="6583680" cy="2540045"/>
           </a:xfrm>
           <a:prstGeom prst="rect">
             <a:avLst/>
@@ -3539,23 +3951,120 @@
       <p:grpSpPr/>
       <p:sp>
         <p:nvSpPr>
-          <p:cNvPr id="2" name="Title 1"/>
-          <p:cNvSpPr>
-            <a:spLocks noGrp="1"/>
-          </p:cNvSpPr>
-          <p:nvPr>
-            <p:ph type="title"/>
-          </p:nvPr>
-        </p:nvSpPr>
-        <p:spPr/>
-        <p:txBody>
-          <a:bodyPr/>
+          <p:cNvPr id="2" name="Rectangle 1"/>
+          <p:cNvSpPr/>
+          <p:nvPr/>
+        </p:nvSpPr>
+        <p:spPr>
+          <a:xfrm>
+            <a:off x="0" y="0"/>
+            <a:ext cx="12191695" cy="1097280"/>
+          </a:xfrm>
+          <a:prstGeom prst="rect">
+            <a:avLst/>
+          </a:prstGeom>
+          <a:solidFill>
+            <a:srgbClr val="1E3A5F"/>
+          </a:solidFill>
+          <a:ln>
+            <a:solidFill>
+              <a:srgbClr val="1E3A5F"/>
+            </a:solidFill>
+          </a:ln>
+        </p:spPr>
+        <p:style>
+          <a:lnRef idx="1">
+            <a:schemeClr val="accent1"/>
+          </a:lnRef>
+          <a:fillRef idx="3">
+            <a:schemeClr val="accent1"/>
+          </a:fillRef>
+          <a:effectRef idx="2">
+            <a:schemeClr val="accent1"/>
+          </a:effectRef>
+          <a:fontRef idx="minor">
+            <a:schemeClr val="lt1"/>
+          </a:fontRef>
+        </p:style>
+        <p:txBody>
+          <a:bodyPr rtlCol="0" anchor="ctr"/>
+          <a:lstStyle/>
+          <a:p>
+            <a:pPr algn="ctr"/>
+          </a:p>
+        </p:txBody>
+      </p:sp>
+      <p:sp>
+        <p:nvSpPr>
+          <p:cNvPr id="3" name="Rectangle 2"/>
+          <p:cNvSpPr/>
+          <p:nvPr/>
+        </p:nvSpPr>
+        <p:spPr>
+          <a:xfrm>
+            <a:off x="0" y="1097280"/>
+            <a:ext cx="12191695" cy="91440"/>
+          </a:xfrm>
+          <a:prstGeom prst="rect">
+            <a:avLst/>
+          </a:prstGeom>
+          <a:solidFill>
+            <a:srgbClr val="3B82F6"/>
+          </a:solidFill>
+          <a:ln>
+            <a:solidFill>
+              <a:srgbClr val="3B82F6"/>
+            </a:solidFill>
+          </a:ln>
+        </p:spPr>
+        <p:style>
+          <a:lnRef idx="1">
+            <a:schemeClr val="accent1"/>
+          </a:lnRef>
+          <a:fillRef idx="3">
+            <a:schemeClr val="accent1"/>
+          </a:fillRef>
+          <a:effectRef idx="2">
+            <a:schemeClr val="accent1"/>
+          </a:effectRef>
+          <a:fontRef idx="minor">
+            <a:schemeClr val="lt1"/>
+          </a:fontRef>
+        </p:style>
+        <p:txBody>
+          <a:bodyPr rtlCol="0" anchor="ctr"/>
+          <a:lstStyle/>
+          <a:p>
+            <a:pPr algn="ctr"/>
+          </a:p>
+        </p:txBody>
+      </p:sp>
+      <p:sp>
+        <p:nvSpPr>
+          <p:cNvPr id="4" name="TextBox 3"/>
+          <p:cNvSpPr txBox="1"/>
+          <p:nvPr/>
+        </p:nvSpPr>
+        <p:spPr>
+          <a:xfrm>
+            <a:off x="457200" y="91440"/>
+            <a:ext cx="11277295" cy="914400"/>
+          </a:xfrm>
+          <a:prstGeom prst="rect">
+            <a:avLst/>
+          </a:prstGeom>
+          <a:noFill/>
+        </p:spPr>
+        <p:txBody>
+          <a:bodyPr wrap="none">
+            <a:spAutoFit/>
+          </a:bodyPr>
           <a:lstStyle/>
           <a:p>
             <a:pPr>
-              <a:defRPr>
+              <a:defRPr b="1" sz="3600">
                 <a:solidFill>
-                  <a:srgbClr val="1E3A5F"/>
+                  <a:srgbClr val="FFFFFF"/>
                 </a:solidFill>
               </a:defRPr>
             </a:pPr>
@@ -3567,25 +4076,32 @@
       </p:sp>
       <p:sp>
         <p:nvSpPr>
-          <p:cNvPr id="3" name="Content Placeholder 2"/>
-          <p:cNvSpPr>
-            <a:spLocks noGrp="1"/>
-          </p:cNvSpPr>
-          <p:nvPr>
-            <p:ph idx="1"/>
-          </p:nvPr>
-        </p:nvSpPr>
-        <p:spPr>
-          <a:xfrm>
-            <a:ext cx="3840480" cy="0"/>
-          </a:xfrm>
-        </p:spPr>
-        <p:txBody>
-          <a:bodyPr/>
+          <p:cNvPr id="5" name="TextBox 4"/>
+          <p:cNvSpPr txBox="1"/>
+          <p:nvPr/>
+        </p:nvSpPr>
+        <p:spPr>
+          <a:xfrm>
+            <a:off x="457200" y="1645920"/>
+            <a:ext cx="4114800" cy="4572000"/>
+          </a:xfrm>
+          <a:prstGeom prst="rect">
+            <a:avLst/>
+          </a:prstGeom>
+          <a:noFill/>
+        </p:spPr>
+        <p:txBody>
+          <a:bodyPr wrap="square">
+            <a:spAutoFit/>
+          </a:bodyPr>
           <a:lstStyle/>
           <a:p>
             <a:pPr>
-              <a:defRPr sz="1800"/>
+              <a:defRPr sz="2200">
+                <a:solidFill>
+                  <a:srgbClr val="323232"/>
+                </a:solidFill>
+              </a:defRPr>
             </a:pPr>
             <a:r>
               <a:t>Resolución formal de Autenticación y Autorización.</a:t>
@@ -3594,30 +4110,38 @@
           <a:p>
             <a:pPr>
               <a:spcBef>
-                <a:spcPts val="800"/>
+                <a:spcPts val="1400"/>
               </a:spcBef>
-              <a:defRPr sz="1800"/>
+              <a:defRPr sz="2200">
+                <a:solidFill>
+                  <a:srgbClr val="323232"/>
+                </a:solidFill>
+              </a:defRPr>
             </a:pPr>
             <a:r>
-              <a:t>Manejo avanzado de Auth Graph corporativo.</a:t>
+              <a:t>• Manejo avanzado de Auth Graph corporativo.</a:t>
             </a:r>
           </a:p>
           <a:p>
             <a:pPr>
               <a:spcBef>
-                <a:spcPts val="800"/>
+                <a:spcPts val="1400"/>
               </a:spcBef>
-              <a:defRPr sz="1800"/>
+              <a:defRPr sz="2200">
+                <a:solidFill>
+                  <a:srgbClr val="323232"/>
+                </a:solidFill>
+              </a:defRPr>
             </a:pPr>
             <a:r>
-              <a:t>Parametrización dinámica.</a:t>
+              <a:t>• Parametrización dinámica.</a:t>
             </a:r>
           </a:p>
         </p:txBody>
       </p:sp>
       <p:pic>
         <p:nvPicPr>
-          <p:cNvPr id="4" name="Picture 3" descr="ppt2_slide4.png"/>
+          <p:cNvPr id="6" name="Picture 5" descr="ppt2_slide4.png"/>
           <p:cNvPicPr>
             <a:picLocks noChangeAspect="1"/>
           </p:cNvPicPr>
@@ -3631,8 +4155,8 @@
         </p:blipFill>
         <p:spPr>
           <a:xfrm>
-            <a:off x="4114800" y="3390511"/>
-            <a:ext cx="4572000" cy="991378"/>
+            <a:off x="5029200" y="1645920"/>
+            <a:ext cx="6583680" cy="1427584"/>
           </a:xfrm>
           <a:prstGeom prst="rect">
             <a:avLst/>
@@ -3659,23 +4183,120 @@
       <p:grpSpPr/>
       <p:sp>
         <p:nvSpPr>
-          <p:cNvPr id="2" name="Title 1"/>
-          <p:cNvSpPr>
-            <a:spLocks noGrp="1"/>
-          </p:cNvSpPr>
-          <p:nvPr>
-            <p:ph type="title"/>
-          </p:nvPr>
-        </p:nvSpPr>
-        <p:spPr/>
-        <p:txBody>
-          <a:bodyPr/>
+          <p:cNvPr id="2" name="Rectangle 1"/>
+          <p:cNvSpPr/>
+          <p:nvPr/>
+        </p:nvSpPr>
+        <p:spPr>
+          <a:xfrm>
+            <a:off x="0" y="0"/>
+            <a:ext cx="12191695" cy="1097280"/>
+          </a:xfrm>
+          <a:prstGeom prst="rect">
+            <a:avLst/>
+          </a:prstGeom>
+          <a:solidFill>
+            <a:srgbClr val="1E3A5F"/>
+          </a:solidFill>
+          <a:ln>
+            <a:solidFill>
+              <a:srgbClr val="1E3A5F"/>
+            </a:solidFill>
+          </a:ln>
+        </p:spPr>
+        <p:style>
+          <a:lnRef idx="1">
+            <a:schemeClr val="accent1"/>
+          </a:lnRef>
+          <a:fillRef idx="3">
+            <a:schemeClr val="accent1"/>
+          </a:fillRef>
+          <a:effectRef idx="2">
+            <a:schemeClr val="accent1"/>
+          </a:effectRef>
+          <a:fontRef idx="minor">
+            <a:schemeClr val="lt1"/>
+          </a:fontRef>
+        </p:style>
+        <p:txBody>
+          <a:bodyPr rtlCol="0" anchor="ctr"/>
+          <a:lstStyle/>
+          <a:p>
+            <a:pPr algn="ctr"/>
+          </a:p>
+        </p:txBody>
+      </p:sp>
+      <p:sp>
+        <p:nvSpPr>
+          <p:cNvPr id="3" name="Rectangle 2"/>
+          <p:cNvSpPr/>
+          <p:nvPr/>
+        </p:nvSpPr>
+        <p:spPr>
+          <a:xfrm>
+            <a:off x="0" y="1097280"/>
+            <a:ext cx="12191695" cy="91440"/>
+          </a:xfrm>
+          <a:prstGeom prst="rect">
+            <a:avLst/>
+          </a:prstGeom>
+          <a:solidFill>
+            <a:srgbClr val="3B82F6"/>
+          </a:solidFill>
+          <a:ln>
+            <a:solidFill>
+              <a:srgbClr val="3B82F6"/>
+            </a:solidFill>
+          </a:ln>
+        </p:spPr>
+        <p:style>
+          <a:lnRef idx="1">
+            <a:schemeClr val="accent1"/>
+          </a:lnRef>
+          <a:fillRef idx="3">
+            <a:schemeClr val="accent1"/>
+          </a:fillRef>
+          <a:effectRef idx="2">
+            <a:schemeClr val="accent1"/>
+          </a:effectRef>
+          <a:fontRef idx="minor">
+            <a:schemeClr val="lt1"/>
+          </a:fontRef>
+        </p:style>
+        <p:txBody>
+          <a:bodyPr rtlCol="0" anchor="ctr"/>
+          <a:lstStyle/>
+          <a:p>
+            <a:pPr algn="ctr"/>
+          </a:p>
+        </p:txBody>
+      </p:sp>
+      <p:sp>
+        <p:nvSpPr>
+          <p:cNvPr id="4" name="TextBox 3"/>
+          <p:cNvSpPr txBox="1"/>
+          <p:nvPr/>
+        </p:nvSpPr>
+        <p:spPr>
+          <a:xfrm>
+            <a:off x="457200" y="91440"/>
+            <a:ext cx="11277295" cy="914400"/>
+          </a:xfrm>
+          <a:prstGeom prst="rect">
+            <a:avLst/>
+          </a:prstGeom>
+          <a:noFill/>
+        </p:spPr>
+        <p:txBody>
+          <a:bodyPr wrap="none">
+            <a:spAutoFit/>
+          </a:bodyPr>
           <a:lstStyle/>
           <a:p>
             <a:pPr>
-              <a:defRPr>
+              <a:defRPr b="1" sz="3600">
                 <a:solidFill>
-                  <a:srgbClr val="1E3A5F"/>
+                  <a:srgbClr val="FFFFFF"/>
                 </a:solidFill>
               </a:defRPr>
             </a:pPr>
@@ -3687,25 +4308,32 @@
       </p:sp>
       <p:sp>
         <p:nvSpPr>
-          <p:cNvPr id="3" name="Content Placeholder 2"/>
-          <p:cNvSpPr>
-            <a:spLocks noGrp="1"/>
-          </p:cNvSpPr>
-          <p:nvPr>
-            <p:ph idx="1"/>
-          </p:nvPr>
-        </p:nvSpPr>
-        <p:spPr>
-          <a:xfrm>
-            <a:ext cx="3840480" cy="0"/>
-          </a:xfrm>
-        </p:spPr>
-        <p:txBody>
-          <a:bodyPr/>
+          <p:cNvPr id="5" name="TextBox 4"/>
+          <p:cNvSpPr txBox="1"/>
+          <p:nvPr/>
+        </p:nvSpPr>
+        <p:spPr>
+          <a:xfrm>
+            <a:off x="457200" y="1645920"/>
+            <a:ext cx="4114800" cy="4572000"/>
+          </a:xfrm>
+          <a:prstGeom prst="rect">
+            <a:avLst/>
+          </a:prstGeom>
+          <a:noFill/>
+        </p:spPr>
+        <p:txBody>
+          <a:bodyPr wrap="square">
+            <a:spAutoFit/>
+          </a:bodyPr>
           <a:lstStyle/>
           <a:p>
             <a:pPr>
-              <a:defRPr sz="1800"/>
+              <a:defRPr sz="2200">
+                <a:solidFill>
+                  <a:srgbClr val="323232"/>
+                </a:solidFill>
+              </a:defRPr>
             </a:pPr>
             <a:r>
               <a:t>Muestra cómo atar un requerimiento de PRD hasta el código.</a:t>
@@ -3714,30 +4342,38 @@
           <a:p>
             <a:pPr>
               <a:spcBef>
-                <a:spcPts val="800"/>
+                <a:spcPts val="1400"/>
               </a:spcBef>
-              <a:defRPr sz="1800"/>
+              <a:defRPr sz="2200">
+                <a:solidFill>
+                  <a:srgbClr val="323232"/>
+                </a:solidFill>
+              </a:defRPr>
             </a:pPr>
             <a:r>
-              <a:t>Historias referenciando ADRs.</a:t>
+              <a:t>• Historias referenciando ADRs.</a:t>
             </a:r>
           </a:p>
           <a:p>
             <a:pPr>
               <a:spcBef>
-                <a:spcPts val="800"/>
+                <a:spcPts val="1400"/>
               </a:spcBef>
-              <a:defRPr sz="1800"/>
+              <a:defRPr sz="2200">
+                <a:solidFill>
+                  <a:srgbClr val="323232"/>
+                </a:solidFill>
+              </a:defRPr>
             </a:pPr>
             <a:r>
-              <a:t>Evidencia viva.</a:t>
+              <a:t>• Evidencia viva.</a:t>
             </a:r>
           </a:p>
         </p:txBody>
       </p:sp>
       <p:pic>
         <p:nvPicPr>
-          <p:cNvPr id="4" name="Picture 3" descr="ppt2_slide5.png"/>
+          <p:cNvPr id="6" name="Picture 5" descr="ppt2_slide5.png"/>
           <p:cNvPicPr>
             <a:picLocks noChangeAspect="1"/>
           </p:cNvPicPr>
@@ -3751,8 +4387,8 @@
         </p:blipFill>
         <p:spPr>
           <a:xfrm>
-            <a:off x="4114800" y="3702503"/>
-            <a:ext cx="4572000" cy="367393"/>
+            <a:off x="5029200" y="1645920"/>
+            <a:ext cx="6583680" cy="529046"/>
           </a:xfrm>
           <a:prstGeom prst="rect">
             <a:avLst/>
@@ -3779,23 +4415,120 @@
       <p:grpSpPr/>
       <p:sp>
         <p:nvSpPr>
-          <p:cNvPr id="2" name="Title 1"/>
-          <p:cNvSpPr>
-            <a:spLocks noGrp="1"/>
-          </p:cNvSpPr>
-          <p:nvPr>
-            <p:ph type="title"/>
-          </p:nvPr>
-        </p:nvSpPr>
-        <p:spPr/>
-        <p:txBody>
-          <a:bodyPr/>
+          <p:cNvPr id="2" name="Rectangle 1"/>
+          <p:cNvSpPr/>
+          <p:nvPr/>
+        </p:nvSpPr>
+        <p:spPr>
+          <a:xfrm>
+            <a:off x="0" y="0"/>
+            <a:ext cx="12191695" cy="1097280"/>
+          </a:xfrm>
+          <a:prstGeom prst="rect">
+            <a:avLst/>
+          </a:prstGeom>
+          <a:solidFill>
+            <a:srgbClr val="1E3A5F"/>
+          </a:solidFill>
+          <a:ln>
+            <a:solidFill>
+              <a:srgbClr val="1E3A5F"/>
+            </a:solidFill>
+          </a:ln>
+        </p:spPr>
+        <p:style>
+          <a:lnRef idx="1">
+            <a:schemeClr val="accent1"/>
+          </a:lnRef>
+          <a:fillRef idx="3">
+            <a:schemeClr val="accent1"/>
+          </a:fillRef>
+          <a:effectRef idx="2">
+            <a:schemeClr val="accent1"/>
+          </a:effectRef>
+          <a:fontRef idx="minor">
+            <a:schemeClr val="lt1"/>
+          </a:fontRef>
+        </p:style>
+        <p:txBody>
+          <a:bodyPr rtlCol="0" anchor="ctr"/>
+          <a:lstStyle/>
+          <a:p>
+            <a:pPr algn="ctr"/>
+          </a:p>
+        </p:txBody>
+      </p:sp>
+      <p:sp>
+        <p:nvSpPr>
+          <p:cNvPr id="3" name="Rectangle 2"/>
+          <p:cNvSpPr/>
+          <p:nvPr/>
+        </p:nvSpPr>
+        <p:spPr>
+          <a:xfrm>
+            <a:off x="0" y="1097280"/>
+            <a:ext cx="12191695" cy="91440"/>
+          </a:xfrm>
+          <a:prstGeom prst="rect">
+            <a:avLst/>
+          </a:prstGeom>
+          <a:solidFill>
+            <a:srgbClr val="3B82F6"/>
+          </a:solidFill>
+          <a:ln>
+            <a:solidFill>
+              <a:srgbClr val="3B82F6"/>
+            </a:solidFill>
+          </a:ln>
+        </p:spPr>
+        <p:style>
+          <a:lnRef idx="1">
+            <a:schemeClr val="accent1"/>
+          </a:lnRef>
+          <a:fillRef idx="3">
+            <a:schemeClr val="accent1"/>
+          </a:fillRef>
+          <a:effectRef idx="2">
+            <a:schemeClr val="accent1"/>
+          </a:effectRef>
+          <a:fontRef idx="minor">
+            <a:schemeClr val="lt1"/>
+          </a:fontRef>
+        </p:style>
+        <p:txBody>
+          <a:bodyPr rtlCol="0" anchor="ctr"/>
+          <a:lstStyle/>
+          <a:p>
+            <a:pPr algn="ctr"/>
+          </a:p>
+        </p:txBody>
+      </p:sp>
+      <p:sp>
+        <p:nvSpPr>
+          <p:cNvPr id="4" name="TextBox 3"/>
+          <p:cNvSpPr txBox="1"/>
+          <p:nvPr/>
+        </p:nvSpPr>
+        <p:spPr>
+          <a:xfrm>
+            <a:off x="457200" y="91440"/>
+            <a:ext cx="11277295" cy="914400"/>
+          </a:xfrm>
+          <a:prstGeom prst="rect">
+            <a:avLst/>
+          </a:prstGeom>
+          <a:noFill/>
+        </p:spPr>
+        <p:txBody>
+          <a:bodyPr wrap="none">
+            <a:spAutoFit/>
+          </a:bodyPr>
           <a:lstStyle/>
           <a:p>
             <a:pPr>
-              <a:defRPr>
+              <a:defRPr b="1" sz="3600">
                 <a:solidFill>
-                  <a:srgbClr val="1E3A5F"/>
+                  <a:srgbClr val="FFFFFF"/>
                 </a:solidFill>
               </a:defRPr>
             </a:pPr>
@@ -3807,25 +4540,32 @@
       </p:sp>
       <p:sp>
         <p:nvSpPr>
-          <p:cNvPr id="3" name="Content Placeholder 2"/>
-          <p:cNvSpPr>
-            <a:spLocks noGrp="1"/>
-          </p:cNvSpPr>
-          <p:nvPr>
-            <p:ph idx="1"/>
-          </p:nvPr>
-        </p:nvSpPr>
-        <p:spPr>
-          <a:xfrm>
-            <a:ext cx="3840480" cy="0"/>
-          </a:xfrm>
-        </p:spPr>
-        <p:txBody>
-          <a:bodyPr/>
+          <p:cNvPr id="5" name="TextBox 4"/>
+          <p:cNvSpPr txBox="1"/>
+          <p:nvPr/>
+        </p:nvSpPr>
+        <p:spPr>
+          <a:xfrm>
+            <a:off x="457200" y="1645920"/>
+            <a:ext cx="4114800" cy="4572000"/>
+          </a:xfrm>
+          <a:prstGeom prst="rect">
+            <a:avLst/>
+          </a:prstGeom>
+          <a:noFill/>
+        </p:spPr>
+        <p:txBody>
+          <a:bodyPr wrap="square">
+            <a:spAutoFit/>
+          </a:bodyPr>
           <a:lstStyle/>
           <a:p>
             <a:pPr>
-              <a:defRPr sz="1800"/>
+              <a:defRPr sz="2200">
+                <a:solidFill>
+                  <a:srgbClr val="323232"/>
+                </a:solidFill>
+              </a:defRPr>
             </a:pPr>
             <a:r>
               <a:t>Los aprendizajes en UMS se promueven.</a:t>
@@ -3834,19 +4574,23 @@
           <a:p>
             <a:pPr>
               <a:spcBef>
-                <a:spcPts val="800"/>
+                <a:spcPts val="1400"/>
               </a:spcBef>
-              <a:defRPr sz="1800"/>
+              <a:defRPr sz="2200">
+                <a:solidFill>
+                  <a:srgbClr val="323232"/>
+                </a:solidFill>
+              </a:defRPr>
             </a:pPr>
             <a:r>
-              <a:t>Las mejoras técnicas locales suben a Evolith como estándares corporativos.</a:t>
+              <a:t>• Las mejoras técnicas locales suben a Evolith como estándares corporativos.</a:t>
             </a:r>
           </a:p>
         </p:txBody>
       </p:sp>
       <p:pic>
         <p:nvPicPr>
-          <p:cNvPr id="4" name="Picture 3" descr="ppt2_slide6.png"/>
+          <p:cNvPr id="6" name="Picture 5" descr="ppt2_slide6.png"/>
           <p:cNvPicPr>
             <a:picLocks noChangeAspect="1"/>
           </p:cNvPicPr>
@@ -3860,8 +4604,8 @@
         </p:blipFill>
         <p:spPr>
           <a:xfrm>
-            <a:off x="4114800" y="3466016"/>
-            <a:ext cx="4572000" cy="840368"/>
+            <a:off x="5029200" y="1645920"/>
+            <a:ext cx="6583680" cy="1210129"/>
           </a:xfrm>
           <a:prstGeom prst="rect">
             <a:avLst/>
@@ -3888,23 +4632,120 @@
       <p:grpSpPr/>
       <p:sp>
         <p:nvSpPr>
-          <p:cNvPr id="2" name="Title 1"/>
-          <p:cNvSpPr>
-            <a:spLocks noGrp="1"/>
-          </p:cNvSpPr>
-          <p:nvPr>
-            <p:ph type="title"/>
-          </p:nvPr>
-        </p:nvSpPr>
-        <p:spPr/>
-        <p:txBody>
-          <a:bodyPr/>
+          <p:cNvPr id="2" name="Rectangle 1"/>
+          <p:cNvSpPr/>
+          <p:nvPr/>
+        </p:nvSpPr>
+        <p:spPr>
+          <a:xfrm>
+            <a:off x="0" y="0"/>
+            <a:ext cx="12191695" cy="1097280"/>
+          </a:xfrm>
+          <a:prstGeom prst="rect">
+            <a:avLst/>
+          </a:prstGeom>
+          <a:solidFill>
+            <a:srgbClr val="1E3A5F"/>
+          </a:solidFill>
+          <a:ln>
+            <a:solidFill>
+              <a:srgbClr val="1E3A5F"/>
+            </a:solidFill>
+          </a:ln>
+        </p:spPr>
+        <p:style>
+          <a:lnRef idx="1">
+            <a:schemeClr val="accent1"/>
+          </a:lnRef>
+          <a:fillRef idx="3">
+            <a:schemeClr val="accent1"/>
+          </a:fillRef>
+          <a:effectRef idx="2">
+            <a:schemeClr val="accent1"/>
+          </a:effectRef>
+          <a:fontRef idx="minor">
+            <a:schemeClr val="lt1"/>
+          </a:fontRef>
+        </p:style>
+        <p:txBody>
+          <a:bodyPr rtlCol="0" anchor="ctr"/>
+          <a:lstStyle/>
+          <a:p>
+            <a:pPr algn="ctr"/>
+          </a:p>
+        </p:txBody>
+      </p:sp>
+      <p:sp>
+        <p:nvSpPr>
+          <p:cNvPr id="3" name="Rectangle 2"/>
+          <p:cNvSpPr/>
+          <p:nvPr/>
+        </p:nvSpPr>
+        <p:spPr>
+          <a:xfrm>
+            <a:off x="0" y="1097280"/>
+            <a:ext cx="12191695" cy="91440"/>
+          </a:xfrm>
+          <a:prstGeom prst="rect">
+            <a:avLst/>
+          </a:prstGeom>
+          <a:solidFill>
+            <a:srgbClr val="3B82F6"/>
+          </a:solidFill>
+          <a:ln>
+            <a:solidFill>
+              <a:srgbClr val="3B82F6"/>
+            </a:solidFill>
+          </a:ln>
+        </p:spPr>
+        <p:style>
+          <a:lnRef idx="1">
+            <a:schemeClr val="accent1"/>
+          </a:lnRef>
+          <a:fillRef idx="3">
+            <a:schemeClr val="accent1"/>
+          </a:fillRef>
+          <a:effectRef idx="2">
+            <a:schemeClr val="accent1"/>
+          </a:effectRef>
+          <a:fontRef idx="minor">
+            <a:schemeClr val="lt1"/>
+          </a:fontRef>
+        </p:style>
+        <p:txBody>
+          <a:bodyPr rtlCol="0" anchor="ctr"/>
+          <a:lstStyle/>
+          <a:p>
+            <a:pPr algn="ctr"/>
+          </a:p>
+        </p:txBody>
+      </p:sp>
+      <p:sp>
+        <p:nvSpPr>
+          <p:cNvPr id="4" name="TextBox 3"/>
+          <p:cNvSpPr txBox="1"/>
+          <p:nvPr/>
+        </p:nvSpPr>
+        <p:spPr>
+          <a:xfrm>
+            <a:off x="457200" y="91440"/>
+            <a:ext cx="11277295" cy="914400"/>
+          </a:xfrm>
+          <a:prstGeom prst="rect">
+            <a:avLst/>
+          </a:prstGeom>
+          <a:noFill/>
+        </p:spPr>
+        <p:txBody>
+          <a:bodyPr wrap="none">
+            <a:spAutoFit/>
+          </a:bodyPr>
           <a:lstStyle/>
           <a:p>
             <a:pPr>
-              <a:defRPr>
+              <a:defRPr b="1" sz="3600">
                 <a:solidFill>
-                  <a:srgbClr val="1E3A5F"/>
+                  <a:srgbClr val="FFFFFF"/>
                 </a:solidFill>
               </a:defRPr>
             </a:pPr>
@@ -3916,25 +4757,32 @@
       </p:sp>
       <p:sp>
         <p:nvSpPr>
-          <p:cNvPr id="3" name="Content Placeholder 2"/>
-          <p:cNvSpPr>
-            <a:spLocks noGrp="1"/>
-          </p:cNvSpPr>
-          <p:nvPr>
-            <p:ph idx="1"/>
-          </p:nvPr>
-        </p:nvSpPr>
-        <p:spPr>
-          <a:xfrm>
-            <a:ext cx="3840480" cy="0"/>
-          </a:xfrm>
-        </p:spPr>
-        <p:txBody>
-          <a:bodyPr/>
+          <p:cNvPr id="5" name="TextBox 4"/>
+          <p:cNvSpPr txBox="1"/>
+          <p:nvPr/>
+        </p:nvSpPr>
+        <p:spPr>
+          <a:xfrm>
+            <a:off x="457200" y="1645920"/>
+            <a:ext cx="4114800" cy="4572000"/>
+          </a:xfrm>
+          <a:prstGeom prst="rect">
+            <a:avLst/>
+          </a:prstGeom>
+          <a:noFill/>
+        </p:spPr>
+        <p:txBody>
+          <a:bodyPr wrap="square">
+            <a:spAutoFit/>
+          </a:bodyPr>
           <a:lstStyle/>
           <a:p>
             <a:pPr>
-              <a:defRPr sz="1800"/>
+              <a:defRPr sz="2200">
+                <a:solidFill>
+                  <a:srgbClr val="323232"/>
+                </a:solidFill>
+              </a:defRPr>
             </a:pPr>
             <a:r>
               <a:t>Start rápido para nuevos equipos.</a:t>
@@ -3943,30 +4791,38 @@
           <a:p>
             <a:pPr>
               <a:spcBef>
-                <a:spcPts val="800"/>
+                <a:spcPts val="1400"/>
               </a:spcBef>
-              <a:defRPr sz="1800"/>
+              <a:defRPr sz="2200">
+                <a:solidFill>
+                  <a:srgbClr val="323232"/>
+                </a:solidFill>
+              </a:defRPr>
             </a:pPr>
             <a:r>
-              <a:t>Menos fricción de andamiaje.</a:t>
+              <a:t>• Menos fricción de andamiaje.</a:t>
             </a:r>
           </a:p>
           <a:p>
             <a:pPr>
               <a:spcBef>
-                <a:spcPts val="800"/>
+                <a:spcPts val="1400"/>
               </a:spcBef>
-              <a:defRPr sz="1800"/>
+              <a:defRPr sz="2200">
+                <a:solidFill>
+                  <a:srgbClr val="323232"/>
+                </a:solidFill>
+              </a:defRPr>
             </a:pPr>
             <a:r>
-              <a:t>Mayor tiempo enfocado en valor de negocio.</a:t>
+              <a:t>• Mayor tiempo enfocado en valor de negocio.</a:t>
             </a:r>
           </a:p>
         </p:txBody>
       </p:sp>
       <p:pic>
         <p:nvPicPr>
-          <p:cNvPr id="4" name="Picture 3" descr="ppt2_slide7.png"/>
+          <p:cNvPr id="6" name="Picture 5" descr="ppt2_slide7.png"/>
           <p:cNvPicPr>
             <a:picLocks noChangeAspect="1"/>
           </p:cNvPicPr>
@@ -3980,8 +4836,8 @@
         </p:blipFill>
         <p:spPr>
           <a:xfrm>
-            <a:off x="4114800" y="2240280"/>
-            <a:ext cx="4572000" cy="3291840"/>
+            <a:off x="5029200" y="1645920"/>
+            <a:ext cx="6583680" cy="4740250"/>
           </a:xfrm>
           <a:prstGeom prst="rect">
             <a:avLst/>
